--- a/public/docs/RCCT_presentation_templates.pptx
+++ b/public/docs/RCCT_presentation_templates.pptx
@@ -269,7 +269,7 @@
           <a:p>
             <a:fld id="{5E9DD4C2-AFDD-4BB1-BE9B-E10AFE5EE611}" type="datetimeFigureOut">
               <a:rPr lang="ru-RU" smtClean="0"/>
-              <a:t>26.06.2025</a:t>
+              <a:t>26.01.2026</a:t>
             </a:fld>
             <a:endParaRPr lang="ru-RU"/>
           </a:p>
@@ -467,7 +467,7 @@
           <a:p>
             <a:fld id="{5E9DD4C2-AFDD-4BB1-BE9B-E10AFE5EE611}" type="datetimeFigureOut">
               <a:rPr lang="ru-RU" smtClean="0"/>
-              <a:t>26.06.2025</a:t>
+              <a:t>26.01.2026</a:t>
             </a:fld>
             <a:endParaRPr lang="ru-RU"/>
           </a:p>
@@ -675,7 +675,7 @@
           <a:p>
             <a:fld id="{5E9DD4C2-AFDD-4BB1-BE9B-E10AFE5EE611}" type="datetimeFigureOut">
               <a:rPr lang="ru-RU" smtClean="0"/>
-              <a:t>26.06.2025</a:t>
+              <a:t>26.01.2026</a:t>
             </a:fld>
             <a:endParaRPr lang="ru-RU"/>
           </a:p>
@@ -873,7 +873,7 @@
           <a:p>
             <a:fld id="{5E9DD4C2-AFDD-4BB1-BE9B-E10AFE5EE611}" type="datetimeFigureOut">
               <a:rPr lang="ru-RU" smtClean="0"/>
-              <a:t>26.06.2025</a:t>
+              <a:t>26.01.2026</a:t>
             </a:fld>
             <a:endParaRPr lang="ru-RU"/>
           </a:p>
@@ -1148,7 +1148,7 @@
           <a:p>
             <a:fld id="{5E9DD4C2-AFDD-4BB1-BE9B-E10AFE5EE611}" type="datetimeFigureOut">
               <a:rPr lang="ru-RU" smtClean="0"/>
-              <a:t>26.06.2025</a:t>
+              <a:t>26.01.2026</a:t>
             </a:fld>
             <a:endParaRPr lang="ru-RU"/>
           </a:p>
@@ -1413,7 +1413,7 @@
           <a:p>
             <a:fld id="{5E9DD4C2-AFDD-4BB1-BE9B-E10AFE5EE611}" type="datetimeFigureOut">
               <a:rPr lang="ru-RU" smtClean="0"/>
-              <a:t>26.06.2025</a:t>
+              <a:t>26.01.2026</a:t>
             </a:fld>
             <a:endParaRPr lang="ru-RU"/>
           </a:p>
@@ -1825,7 +1825,7 @@
           <a:p>
             <a:fld id="{5E9DD4C2-AFDD-4BB1-BE9B-E10AFE5EE611}" type="datetimeFigureOut">
               <a:rPr lang="ru-RU" smtClean="0"/>
-              <a:t>26.06.2025</a:t>
+              <a:t>26.01.2026</a:t>
             </a:fld>
             <a:endParaRPr lang="ru-RU"/>
           </a:p>
@@ -1966,7 +1966,7 @@
           <a:p>
             <a:fld id="{5E9DD4C2-AFDD-4BB1-BE9B-E10AFE5EE611}" type="datetimeFigureOut">
               <a:rPr lang="ru-RU" smtClean="0"/>
-              <a:t>26.06.2025</a:t>
+              <a:t>26.01.2026</a:t>
             </a:fld>
             <a:endParaRPr lang="ru-RU"/>
           </a:p>
@@ -2079,7 +2079,7 @@
           <a:p>
             <a:fld id="{5E9DD4C2-AFDD-4BB1-BE9B-E10AFE5EE611}" type="datetimeFigureOut">
               <a:rPr lang="ru-RU" smtClean="0"/>
-              <a:t>26.06.2025</a:t>
+              <a:t>26.01.2026</a:t>
             </a:fld>
             <a:endParaRPr lang="ru-RU"/>
           </a:p>
@@ -2390,7 +2390,7 @@
           <a:p>
             <a:fld id="{5E9DD4C2-AFDD-4BB1-BE9B-E10AFE5EE611}" type="datetimeFigureOut">
               <a:rPr lang="ru-RU" smtClean="0"/>
-              <a:t>26.06.2025</a:t>
+              <a:t>26.01.2026</a:t>
             </a:fld>
             <a:endParaRPr lang="ru-RU"/>
           </a:p>
@@ -2678,7 +2678,7 @@
           <a:p>
             <a:fld id="{5E9DD4C2-AFDD-4BB1-BE9B-E10AFE5EE611}" type="datetimeFigureOut">
               <a:rPr lang="ru-RU" smtClean="0"/>
-              <a:t>26.06.2025</a:t>
+              <a:t>26.01.2026</a:t>
             </a:fld>
             <a:endParaRPr lang="ru-RU"/>
           </a:p>
@@ -2919,7 +2919,7 @@
           <a:p>
             <a:fld id="{5E9DD4C2-AFDD-4BB1-BE9B-E10AFE5EE611}" type="datetimeFigureOut">
               <a:rPr lang="ru-RU" smtClean="0"/>
-              <a:t>26.06.2025</a:t>
+              <a:t>26.01.2026</a:t>
             </a:fld>
             <a:endParaRPr lang="ru-RU"/>
           </a:p>
@@ -3425,19 +3425,18 @@
         <p:blipFill>
           <a:blip r:embed="rId5">
             <a:extLst>
-              <a:ext uri="{96DAC541-7B7A-43D3-8B79-37D633B846F1}">
-                <asvg:svgBlip xmlns:asvg="http://schemas.microsoft.com/office/drawing/2016/SVG/main" r:embed="rId6"/>
+              <a:ext uri="{28A0092B-C50C-407E-A947-70E740481C1C}">
+                <a14:useLocalDpi xmlns:a14="http://schemas.microsoft.com/office/drawing/2010/main" val="0"/>
               </a:ext>
             </a:extLst>
           </a:blip>
-          <a:stretch>
-            <a:fillRect/>
-          </a:stretch>
+          <a:srcRect/>
+          <a:stretch/>
         </p:blipFill>
         <p:spPr>
           <a:xfrm>
-            <a:off x="633412" y="5357812"/>
-            <a:ext cx="5248275" cy="1038225"/>
+            <a:off x="486901" y="5223754"/>
+            <a:ext cx="4972639" cy="1172284"/>
           </a:xfrm>
           <a:prstGeom prst="rect">
             <a:avLst/>
@@ -3459,10 +3458,10 @@
           <p:nvPr/>
         </p:nvPicPr>
         <p:blipFill>
-          <a:blip r:embed="rId7">
+          <a:blip r:embed="rId6">
             <a:extLst>
               <a:ext uri="{96DAC541-7B7A-43D3-8B79-37D633B846F1}">
-                <asvg:svgBlip xmlns:asvg="http://schemas.microsoft.com/office/drawing/2016/SVG/main" r:embed="rId8"/>
+                <asvg:svgBlip xmlns:asvg="http://schemas.microsoft.com/office/drawing/2016/SVG/main" r:embed="rId7"/>
               </a:ext>
             </a:extLst>
           </a:blip>
@@ -3667,10 +3666,10 @@
       </p:grpSpPr>
       <p:pic>
         <p:nvPicPr>
-          <p:cNvPr id="12" name="Рисунок 11">
-            <a:extLst>
-              <a:ext uri="{FF2B5EF4-FFF2-40B4-BE49-F238E27FC236}">
-                <a16:creationId xmlns:a16="http://schemas.microsoft.com/office/drawing/2014/main" id="{0DADA73F-D142-0656-88C6-F720ACD28344}"/>
+          <p:cNvPr id="7" name="Рисунок 6" descr="Изображение выглядит как искусство, линия, зарисовка, дизайн&#10;&#10;Содержимое, созданное искусственным интеллектом, может быть неверным.">
+            <a:extLst>
+              <a:ext uri="{FF2B5EF4-FFF2-40B4-BE49-F238E27FC236}">
+                <a16:creationId xmlns:a16="http://schemas.microsoft.com/office/drawing/2014/main" id="{61F17039-EA44-B1F2-6DD1-ABC629E1C362}"/>
               </a:ext>
             </a:extLst>
           </p:cNvPr>
@@ -3682,19 +3681,20 @@
         <p:blipFill>
           <a:blip r:embed="rId2">
             <a:extLst>
-              <a:ext uri="{96DAC541-7B7A-43D3-8B79-37D633B846F1}">
-                <asvg:svgBlip xmlns:asvg="http://schemas.microsoft.com/office/drawing/2016/SVG/main" r:embed="rId3"/>
+              <a:ext uri="{28A0092B-C50C-407E-A947-70E740481C1C}">
+                <a14:useLocalDpi xmlns:a14="http://schemas.microsoft.com/office/drawing/2010/main" val="0"/>
               </a:ext>
             </a:extLst>
           </a:blip>
+          <a:srcRect l="-2006" t="17766" r="26877" b="-3827"/>
           <a:stretch>
             <a:fillRect/>
           </a:stretch>
         </p:blipFill>
         <p:spPr>
           <a:xfrm>
-            <a:off x="4710112" y="327599"/>
-            <a:ext cx="4638675" cy="1076325"/>
+            <a:off x="9435830" y="1"/>
+            <a:ext cx="2756170" cy="3157240"/>
           </a:xfrm>
           <a:prstGeom prst="rect">
             <a:avLst/>
@@ -3703,10 +3703,10 @@
       </p:pic>
       <p:pic>
         <p:nvPicPr>
-          <p:cNvPr id="7" name="Рисунок 6" descr="Изображение выглядит как искусство, линия, зарисовка, дизайн&#10;&#10;Содержимое, созданное искусственным интеллектом, может быть неверным.">
-            <a:extLst>
-              <a:ext uri="{FF2B5EF4-FFF2-40B4-BE49-F238E27FC236}">
-                <a16:creationId xmlns:a16="http://schemas.microsoft.com/office/drawing/2014/main" id="{61F17039-EA44-B1F2-6DD1-ABC629E1C362}"/>
+          <p:cNvPr id="19" name="Рисунок 18">
+            <a:extLst>
+              <a:ext uri="{FF2B5EF4-FFF2-40B4-BE49-F238E27FC236}">
+                <a16:creationId xmlns:a16="http://schemas.microsoft.com/office/drawing/2014/main" id="{DCE7E24A-CB2A-382A-8601-B323131E631A}"/>
               </a:ext>
             </a:extLst>
           </p:cNvPr>
@@ -3716,34 +3716,181 @@
           <p:nvPr/>
         </p:nvPicPr>
         <p:blipFill>
-          <a:blip r:embed="rId4">
-            <a:extLst>
-              <a:ext uri="{28A0092B-C50C-407E-A947-70E740481C1C}">
-                <a14:useLocalDpi xmlns:a14="http://schemas.microsoft.com/office/drawing/2010/main" val="0"/>
+          <a:blip r:embed="rId3">
+            <a:extLst>
+              <a:ext uri="{96DAC541-7B7A-43D3-8B79-37D633B846F1}">
+                <asvg:svgBlip xmlns:asvg="http://schemas.microsoft.com/office/drawing/2016/SVG/main" r:embed="rId4"/>
               </a:ext>
             </a:extLst>
           </a:blip>
-          <a:srcRect l="-2006" t="17766" r="26877" b="-3827"/>
           <a:stretch>
             <a:fillRect/>
           </a:stretch>
         </p:blipFill>
         <p:spPr>
           <a:xfrm>
-            <a:off x="9435830" y="1"/>
-            <a:ext cx="2756170" cy="3157240"/>
+            <a:off x="8968902" y="6013278"/>
+            <a:ext cx="1275944" cy="517123"/>
           </a:xfrm>
           <a:prstGeom prst="rect">
             <a:avLst/>
           </a:prstGeom>
         </p:spPr>
       </p:pic>
+      <p:sp>
+        <p:nvSpPr>
+          <p:cNvPr id="13" name="TextBox 12">
+            <a:extLst>
+              <a:ext uri="{FF2B5EF4-FFF2-40B4-BE49-F238E27FC236}">
+                <a16:creationId xmlns:a16="http://schemas.microsoft.com/office/drawing/2014/main" id="{7E9CDCB9-07EC-B133-A4BE-5EDE6ABB7DA3}"/>
+              </a:ext>
+            </a:extLst>
+          </p:cNvPr>
+          <p:cNvSpPr txBox="1"/>
+          <p:nvPr/>
+        </p:nvSpPr>
+        <p:spPr>
+          <a:xfrm>
+            <a:off x="2507456" y="3362586"/>
+            <a:ext cx="7177088" cy="646331"/>
+          </a:xfrm>
+          <a:prstGeom prst="rect">
+            <a:avLst/>
+          </a:prstGeom>
+          <a:noFill/>
+        </p:spPr>
+        <p:txBody>
+          <a:bodyPr wrap="square" rtlCol="0">
+            <a:spAutoFit/>
+          </a:bodyPr>
+          <a:lstStyle/>
+          <a:p>
+            <a:pPr algn="ctr"/>
+            <a:r>
+              <a:rPr lang="en-US" sz="3600" dirty="0">
+                <a:solidFill>
+                  <a:srgbClr val="2E2C7E"/>
+                </a:solidFill>
+                <a:latin typeface="+mj-lt"/>
+              </a:rPr>
+              <a:t>TITLE</a:t>
+            </a:r>
+            <a:endParaRPr lang="ru-RU" sz="3600" dirty="0">
+              <a:solidFill>
+                <a:srgbClr val="2E2C7E"/>
+              </a:solidFill>
+              <a:latin typeface="+mj-lt"/>
+            </a:endParaRPr>
+          </a:p>
+        </p:txBody>
+      </p:sp>
+      <p:sp>
+        <p:nvSpPr>
+          <p:cNvPr id="15" name="TextBox 14">
+            <a:extLst>
+              <a:ext uri="{FF2B5EF4-FFF2-40B4-BE49-F238E27FC236}">
+                <a16:creationId xmlns:a16="http://schemas.microsoft.com/office/drawing/2014/main" id="{5E558E97-6E15-FEEA-DBEC-B5A4C4B96F4D}"/>
+              </a:ext>
+            </a:extLst>
+          </p:cNvPr>
+          <p:cNvSpPr txBox="1"/>
+          <p:nvPr/>
+        </p:nvSpPr>
+        <p:spPr>
+          <a:xfrm>
+            <a:off x="2507456" y="3911344"/>
+            <a:ext cx="7177088" cy="369332"/>
+          </a:xfrm>
+          <a:prstGeom prst="rect">
+            <a:avLst/>
+          </a:prstGeom>
+          <a:noFill/>
+        </p:spPr>
+        <p:txBody>
+          <a:bodyPr wrap="square" rtlCol="0">
+            <a:spAutoFit/>
+          </a:bodyPr>
+          <a:lstStyle/>
+          <a:p>
+            <a:pPr algn="ctr"/>
+            <a:r>
+              <a:rPr lang="en-US" dirty="0">
+                <a:solidFill>
+                  <a:srgbClr val="2E2C7E"/>
+                </a:solidFill>
+              </a:rPr>
+              <a:t>Subtitle</a:t>
+            </a:r>
+            <a:endParaRPr lang="ru-RU" dirty="0">
+              <a:solidFill>
+                <a:srgbClr val="2E2C7E"/>
+              </a:solidFill>
+            </a:endParaRPr>
+          </a:p>
+        </p:txBody>
+      </p:sp>
+      <p:sp>
+        <p:nvSpPr>
+          <p:cNvPr id="16" name="TextBox 15">
+            <a:extLst>
+              <a:ext uri="{FF2B5EF4-FFF2-40B4-BE49-F238E27FC236}">
+                <a16:creationId xmlns:a16="http://schemas.microsoft.com/office/drawing/2014/main" id="{853C38FC-E7B1-D921-F12D-11FE3CB1C168}"/>
+              </a:ext>
+            </a:extLst>
+          </p:cNvPr>
+          <p:cNvSpPr txBox="1"/>
+          <p:nvPr/>
+        </p:nvSpPr>
+        <p:spPr>
+          <a:xfrm>
+            <a:off x="1682704" y="4829434"/>
+            <a:ext cx="3662363" cy="923330"/>
+          </a:xfrm>
+          <a:prstGeom prst="rect">
+            <a:avLst/>
+          </a:prstGeom>
+          <a:noFill/>
+        </p:spPr>
+        <p:txBody>
+          <a:bodyPr wrap="square" rtlCol="0">
+            <a:spAutoFit/>
+          </a:bodyPr>
+          <a:lstStyle/>
+          <a:p>
+            <a:r>
+              <a:rPr lang="en-US" dirty="0">
+                <a:solidFill>
+                  <a:srgbClr val="2E2C7E"/>
+                </a:solidFill>
+              </a:rPr>
+              <a:t>Speaker</a:t>
+            </a:r>
+          </a:p>
+          <a:p>
+            <a:r>
+              <a:rPr lang="en-US" dirty="0">
+                <a:solidFill>
+                  <a:srgbClr val="2E2C7E"/>
+                </a:solidFill>
+              </a:rPr>
+              <a:t>Name</a:t>
+            </a:r>
+          </a:p>
+          <a:p>
+            <a:endParaRPr lang="ru-RU" dirty="0">
+              <a:solidFill>
+                <a:srgbClr val="2E2C7E"/>
+              </a:solidFill>
+            </a:endParaRPr>
+          </a:p>
+        </p:txBody>
+      </p:sp>
       <p:pic>
         <p:nvPicPr>
-          <p:cNvPr id="19" name="Рисунок 18">
-            <a:extLst>
-              <a:ext uri="{FF2B5EF4-FFF2-40B4-BE49-F238E27FC236}">
-                <a16:creationId xmlns:a16="http://schemas.microsoft.com/office/drawing/2014/main" id="{DCE7E24A-CB2A-382A-8601-B323131E631A}"/>
+          <p:cNvPr id="18" name="Рисунок 17">
+            <a:extLst>
+              <a:ext uri="{FF2B5EF4-FFF2-40B4-BE49-F238E27FC236}">
+                <a16:creationId xmlns:a16="http://schemas.microsoft.com/office/drawing/2014/main" id="{0A6F6080-6FE6-F6B4-33D6-3F5A6FEA7BFE}"/>
               </a:ext>
             </a:extLst>
           </p:cNvPr>
@@ -3766,168 +3913,20 @@
         </p:blipFill>
         <p:spPr>
           <a:xfrm>
-            <a:off x="8968902" y="6013278"/>
-            <a:ext cx="1275944" cy="517123"/>
+            <a:off x="10613781" y="5952870"/>
+            <a:ext cx="1197321" cy="577531"/>
           </a:xfrm>
           <a:prstGeom prst="rect">
             <a:avLst/>
           </a:prstGeom>
         </p:spPr>
       </p:pic>
-      <p:sp>
-        <p:nvSpPr>
-          <p:cNvPr id="13" name="TextBox 12">
-            <a:extLst>
-              <a:ext uri="{FF2B5EF4-FFF2-40B4-BE49-F238E27FC236}">
-                <a16:creationId xmlns:a16="http://schemas.microsoft.com/office/drawing/2014/main" id="{7E9CDCB9-07EC-B133-A4BE-5EDE6ABB7DA3}"/>
-              </a:ext>
-            </a:extLst>
-          </p:cNvPr>
-          <p:cNvSpPr txBox="1"/>
-          <p:nvPr/>
-        </p:nvSpPr>
-        <p:spPr>
-          <a:xfrm>
-            <a:off x="2507456" y="3362586"/>
-            <a:ext cx="7177088" cy="646331"/>
-          </a:xfrm>
-          <a:prstGeom prst="rect">
-            <a:avLst/>
-          </a:prstGeom>
-          <a:noFill/>
-        </p:spPr>
-        <p:txBody>
-          <a:bodyPr wrap="square" rtlCol="0">
-            <a:spAutoFit/>
-          </a:bodyPr>
-          <a:lstStyle/>
-          <a:p>
-            <a:pPr algn="ctr"/>
-            <a:r>
-              <a:rPr lang="en-US" sz="3600" dirty="0">
-                <a:solidFill>
-                  <a:srgbClr val="2E2C7E"/>
-                </a:solidFill>
-                <a:latin typeface="+mj-lt"/>
-              </a:rPr>
-              <a:t>TITLE</a:t>
-            </a:r>
-            <a:endParaRPr lang="ru-RU" sz="3600" dirty="0">
-              <a:solidFill>
-                <a:srgbClr val="2E2C7E"/>
-              </a:solidFill>
-              <a:latin typeface="+mj-lt"/>
-            </a:endParaRPr>
-          </a:p>
-        </p:txBody>
-      </p:sp>
-      <p:sp>
-        <p:nvSpPr>
-          <p:cNvPr id="15" name="TextBox 14">
-            <a:extLst>
-              <a:ext uri="{FF2B5EF4-FFF2-40B4-BE49-F238E27FC236}">
-                <a16:creationId xmlns:a16="http://schemas.microsoft.com/office/drawing/2014/main" id="{5E558E97-6E15-FEEA-DBEC-B5A4C4B96F4D}"/>
-              </a:ext>
-            </a:extLst>
-          </p:cNvPr>
-          <p:cNvSpPr txBox="1"/>
-          <p:nvPr/>
-        </p:nvSpPr>
-        <p:spPr>
-          <a:xfrm>
-            <a:off x="2507456" y="3911344"/>
-            <a:ext cx="7177088" cy="369332"/>
-          </a:xfrm>
-          <a:prstGeom prst="rect">
-            <a:avLst/>
-          </a:prstGeom>
-          <a:noFill/>
-        </p:spPr>
-        <p:txBody>
-          <a:bodyPr wrap="square" rtlCol="0">
-            <a:spAutoFit/>
-          </a:bodyPr>
-          <a:lstStyle/>
-          <a:p>
-            <a:pPr algn="ctr"/>
-            <a:r>
-              <a:rPr lang="en-US" dirty="0">
-                <a:solidFill>
-                  <a:srgbClr val="2E2C7E"/>
-                </a:solidFill>
-              </a:rPr>
-              <a:t>Subtitle</a:t>
-            </a:r>
-            <a:endParaRPr lang="ru-RU" dirty="0">
-              <a:solidFill>
-                <a:srgbClr val="2E2C7E"/>
-              </a:solidFill>
-            </a:endParaRPr>
-          </a:p>
-        </p:txBody>
-      </p:sp>
-      <p:sp>
-        <p:nvSpPr>
-          <p:cNvPr id="16" name="TextBox 15">
-            <a:extLst>
-              <a:ext uri="{FF2B5EF4-FFF2-40B4-BE49-F238E27FC236}">
-                <a16:creationId xmlns:a16="http://schemas.microsoft.com/office/drawing/2014/main" id="{853C38FC-E7B1-D921-F12D-11FE3CB1C168}"/>
-              </a:ext>
-            </a:extLst>
-          </p:cNvPr>
-          <p:cNvSpPr txBox="1"/>
-          <p:nvPr/>
-        </p:nvSpPr>
-        <p:spPr>
-          <a:xfrm>
-            <a:off x="1682704" y="4829434"/>
-            <a:ext cx="3662363" cy="923330"/>
-          </a:xfrm>
-          <a:prstGeom prst="rect">
-            <a:avLst/>
-          </a:prstGeom>
-          <a:noFill/>
-        </p:spPr>
-        <p:txBody>
-          <a:bodyPr wrap="square" rtlCol="0">
-            <a:spAutoFit/>
-          </a:bodyPr>
-          <a:lstStyle/>
-          <a:p>
-            <a:r>
-              <a:rPr lang="en-US" dirty="0">
-                <a:solidFill>
-                  <a:srgbClr val="2E2C7E"/>
-                </a:solidFill>
-              </a:rPr>
-              <a:t>Speaker</a:t>
-            </a:r>
-          </a:p>
-          <a:p>
-            <a:r>
-              <a:rPr lang="en-US" dirty="0">
-                <a:solidFill>
-                  <a:srgbClr val="2E2C7E"/>
-                </a:solidFill>
-              </a:rPr>
-              <a:t>Name</a:t>
-            </a:r>
-          </a:p>
-          <a:p>
-            <a:endParaRPr lang="ru-RU" dirty="0">
-              <a:solidFill>
-                <a:srgbClr val="2E2C7E"/>
-              </a:solidFill>
-            </a:endParaRPr>
-          </a:p>
-        </p:txBody>
-      </p:sp>
       <p:pic>
         <p:nvPicPr>
-          <p:cNvPr id="18" name="Рисунок 17">
-            <a:extLst>
-              <a:ext uri="{FF2B5EF4-FFF2-40B4-BE49-F238E27FC236}">
-                <a16:creationId xmlns:a16="http://schemas.microsoft.com/office/drawing/2014/main" id="{0A6F6080-6FE6-F6B4-33D6-3F5A6FEA7BFE}"/>
+          <p:cNvPr id="5" name="Рисунок 4">
+            <a:extLst>
+              <a:ext uri="{FF2B5EF4-FFF2-40B4-BE49-F238E27FC236}">
+                <a16:creationId xmlns:a16="http://schemas.microsoft.com/office/drawing/2014/main" id="{D8A54FDC-9EF9-B895-736F-1A34DB24EC04}"/>
               </a:ext>
             </a:extLst>
           </p:cNvPr>
@@ -3950,8 +3949,8 @@
         </p:blipFill>
         <p:spPr>
           <a:xfrm>
-            <a:off x="10613781" y="5952870"/>
-            <a:ext cx="1197321" cy="577531"/>
+            <a:off x="4632697" y="327599"/>
+            <a:ext cx="4638675" cy="1076325"/>
           </a:xfrm>
           <a:prstGeom prst="rect">
             <a:avLst/>
@@ -3996,10 +3995,10 @@
       </p:grpSpPr>
       <p:pic>
         <p:nvPicPr>
-          <p:cNvPr id="3" name="Рисунок 2">
-            <a:extLst>
-              <a:ext uri="{FF2B5EF4-FFF2-40B4-BE49-F238E27FC236}">
-                <a16:creationId xmlns:a16="http://schemas.microsoft.com/office/drawing/2014/main" id="{B9D86E9B-0831-2C87-1E3B-8FBB2586DC1F}"/>
+          <p:cNvPr id="7" name="Рисунок 6" descr="Изображение выглядит как искусство, линия, зарисовка, дизайн&#10;&#10;Содержимое, созданное искусственным интеллектом, может быть неверным.">
+            <a:extLst>
+              <a:ext uri="{FF2B5EF4-FFF2-40B4-BE49-F238E27FC236}">
+                <a16:creationId xmlns:a16="http://schemas.microsoft.com/office/drawing/2014/main" id="{13BF6346-CB27-D50F-D140-70944FF51539}"/>
               </a:ext>
             </a:extLst>
           </p:cNvPr>
@@ -4011,42 +4010,6 @@
         <p:blipFill>
           <a:blip r:embed="rId2">
             <a:extLst>
-              <a:ext uri="{96DAC541-7B7A-43D3-8B79-37D633B846F1}">
-                <asvg:svgBlip xmlns:asvg="http://schemas.microsoft.com/office/drawing/2016/SVG/main" r:embed="rId3"/>
-              </a:ext>
-            </a:extLst>
-          </a:blip>
-          <a:stretch>
-            <a:fillRect/>
-          </a:stretch>
-        </p:blipFill>
-        <p:spPr>
-          <a:xfrm>
-            <a:off x="8968902" y="6013278"/>
-            <a:ext cx="1187986" cy="517123"/>
-          </a:xfrm>
-          <a:prstGeom prst="rect">
-            <a:avLst/>
-          </a:prstGeom>
-        </p:spPr>
-      </p:pic>
-      <p:pic>
-        <p:nvPicPr>
-          <p:cNvPr id="7" name="Рисунок 6" descr="Изображение выглядит как искусство, линия, зарисовка, дизайн&#10;&#10;Содержимое, созданное искусственным интеллектом, может быть неверным.">
-            <a:extLst>
-              <a:ext uri="{FF2B5EF4-FFF2-40B4-BE49-F238E27FC236}">
-                <a16:creationId xmlns:a16="http://schemas.microsoft.com/office/drawing/2014/main" id="{13BF6346-CB27-D50F-D140-70944FF51539}"/>
-              </a:ext>
-            </a:extLst>
-          </p:cNvPr>
-          <p:cNvPicPr>
-            <a:picLocks noChangeAspect="1"/>
-          </p:cNvPicPr>
-          <p:nvPr/>
-        </p:nvPicPr>
-        <p:blipFill>
-          <a:blip r:embed="rId4">
-            <a:extLst>
               <a:ext uri="{28A0092B-C50C-407E-A947-70E740481C1C}">
                 <a14:useLocalDpi xmlns:a14="http://schemas.microsoft.com/office/drawing/2010/main" val="0"/>
               </a:ext>
@@ -4222,10 +4185,10 @@
           <p:nvPr/>
         </p:nvPicPr>
         <p:blipFill>
-          <a:blip r:embed="rId5">
+          <a:blip r:embed="rId3">
             <a:extLst>
               <a:ext uri="{96DAC541-7B7A-43D3-8B79-37D633B846F1}">
-                <asvg:svgBlip xmlns:asvg="http://schemas.microsoft.com/office/drawing/2016/SVG/main" r:embed="rId6"/>
+                <asvg:svgBlip xmlns:asvg="http://schemas.microsoft.com/office/drawing/2016/SVG/main" r:embed="rId4"/>
               </a:ext>
             </a:extLst>
           </a:blip>
@@ -4245,10 +4208,46 @@
       </p:pic>
       <p:pic>
         <p:nvPicPr>
-          <p:cNvPr id="2" name="Рисунок 1">
-            <a:extLst>
-              <a:ext uri="{FF2B5EF4-FFF2-40B4-BE49-F238E27FC236}">
-                <a16:creationId xmlns:a16="http://schemas.microsoft.com/office/drawing/2014/main" id="{6E86A709-B59A-7F19-3578-A4BAF9E7BA47}"/>
+          <p:cNvPr id="5" name="Рисунок 4">
+            <a:extLst>
+              <a:ext uri="{FF2B5EF4-FFF2-40B4-BE49-F238E27FC236}">
+                <a16:creationId xmlns:a16="http://schemas.microsoft.com/office/drawing/2014/main" id="{88A5BCCD-AF93-6731-3232-11337788C5E4}"/>
+              </a:ext>
+            </a:extLst>
+          </p:cNvPr>
+          <p:cNvPicPr>
+            <a:picLocks noChangeAspect="1"/>
+          </p:cNvPicPr>
+          <p:nvPr/>
+        </p:nvPicPr>
+        <p:blipFill>
+          <a:blip r:embed="rId5">
+            <a:extLst>
+              <a:ext uri="{96DAC541-7B7A-43D3-8B79-37D633B846F1}">
+                <asvg:svgBlip xmlns:asvg="http://schemas.microsoft.com/office/drawing/2016/SVG/main" r:embed="rId6"/>
+              </a:ext>
+            </a:extLst>
+          </a:blip>
+          <a:stretch>
+            <a:fillRect/>
+          </a:stretch>
+        </p:blipFill>
+        <p:spPr>
+          <a:xfrm>
+            <a:off x="4277029" y="327599"/>
+            <a:ext cx="5038725" cy="1095375"/>
+          </a:xfrm>
+          <a:prstGeom prst="rect">
+            <a:avLst/>
+          </a:prstGeom>
+        </p:spPr>
+      </p:pic>
+      <p:pic>
+        <p:nvPicPr>
+          <p:cNvPr id="4" name="Рисунок 3">
+            <a:extLst>
+              <a:ext uri="{FF2B5EF4-FFF2-40B4-BE49-F238E27FC236}">
+                <a16:creationId xmlns:a16="http://schemas.microsoft.com/office/drawing/2014/main" id="{B71781A5-F728-F54D-4562-F881008C585C}"/>
               </a:ext>
             </a:extLst>
           </p:cNvPr>
@@ -4271,8 +4270,8 @@
         </p:blipFill>
         <p:spPr>
           <a:xfrm>
-            <a:off x="4310062" y="291505"/>
-            <a:ext cx="5038725" cy="1095375"/>
+            <a:off x="8968902" y="6013278"/>
+            <a:ext cx="1197321" cy="521187"/>
           </a:xfrm>
           <a:prstGeom prst="rect">
             <a:avLst/>
@@ -4353,10 +4352,10 @@
       </p:pic>
       <p:pic>
         <p:nvPicPr>
-          <p:cNvPr id="16" name="Рисунок 15">
-            <a:extLst>
-              <a:ext uri="{FF2B5EF4-FFF2-40B4-BE49-F238E27FC236}">
-                <a16:creationId xmlns:a16="http://schemas.microsoft.com/office/drawing/2014/main" id="{B57DF377-A7DE-3EDA-64DF-139AC3E2F7B3}"/>
+          <p:cNvPr id="18" name="Рисунок 17">
+            <a:extLst>
+              <a:ext uri="{FF2B5EF4-FFF2-40B4-BE49-F238E27FC236}">
+                <a16:creationId xmlns:a16="http://schemas.microsoft.com/office/drawing/2014/main" id="{21C7F9E3-D447-1D00-DDEE-318287B2A106}"/>
               </a:ext>
             </a:extLst>
           </p:cNvPr>
@@ -4379,8 +4378,8 @@
         </p:blipFill>
         <p:spPr>
           <a:xfrm>
-            <a:off x="7893587" y="458742"/>
-            <a:ext cx="1462536" cy="636633"/>
+            <a:off x="10034436" y="412727"/>
+            <a:ext cx="1479251" cy="713521"/>
           </a:xfrm>
           <a:prstGeom prst="rect">
             <a:avLst/>
@@ -4389,10 +4388,10 @@
       </p:pic>
       <p:pic>
         <p:nvPicPr>
-          <p:cNvPr id="18" name="Рисунок 17">
-            <a:extLst>
-              <a:ext uri="{FF2B5EF4-FFF2-40B4-BE49-F238E27FC236}">
-                <a16:creationId xmlns:a16="http://schemas.microsoft.com/office/drawing/2014/main" id="{21C7F9E3-D447-1D00-DDEE-318287B2A106}"/>
+          <p:cNvPr id="24" name="Рисунок 23">
+            <a:extLst>
+              <a:ext uri="{FF2B5EF4-FFF2-40B4-BE49-F238E27FC236}">
+                <a16:creationId xmlns:a16="http://schemas.microsoft.com/office/drawing/2014/main" id="{0F140256-6A57-80D3-804C-84FC178EF0CD}"/>
               </a:ext>
             </a:extLst>
           </p:cNvPr>
@@ -4404,55 +4403,18 @@
         <p:blipFill>
           <a:blip r:embed="rId5">
             <a:extLst>
-              <a:ext uri="{96DAC541-7B7A-43D3-8B79-37D633B846F1}">
-                <asvg:svgBlip xmlns:asvg="http://schemas.microsoft.com/office/drawing/2016/SVG/main" r:embed="rId6"/>
+              <a:ext uri="{28A0092B-C50C-407E-A947-70E740481C1C}">
+                <a14:useLocalDpi xmlns:a14="http://schemas.microsoft.com/office/drawing/2010/main" val="0"/>
               </a:ext>
             </a:extLst>
           </a:blip>
-          <a:stretch>
-            <a:fillRect/>
-          </a:stretch>
+          <a:srcRect/>
+          <a:stretch/>
         </p:blipFill>
         <p:spPr>
           <a:xfrm>
-            <a:off x="10034436" y="412727"/>
-            <a:ext cx="1479251" cy="713521"/>
-          </a:xfrm>
-          <a:prstGeom prst="rect">
-            <a:avLst/>
-          </a:prstGeom>
-        </p:spPr>
-      </p:pic>
-      <p:pic>
-        <p:nvPicPr>
-          <p:cNvPr id="24" name="Рисунок 23">
-            <a:extLst>
-              <a:ext uri="{FF2B5EF4-FFF2-40B4-BE49-F238E27FC236}">
-                <a16:creationId xmlns:a16="http://schemas.microsoft.com/office/drawing/2014/main" id="{0F140256-6A57-80D3-804C-84FC178EF0CD}"/>
-              </a:ext>
-            </a:extLst>
-          </p:cNvPr>
-          <p:cNvPicPr>
-            <a:picLocks noChangeAspect="1"/>
-          </p:cNvPicPr>
-          <p:nvPr/>
-        </p:nvPicPr>
-        <p:blipFill>
-          <a:blip r:embed="rId7">
-            <a:extLst>
-              <a:ext uri="{96DAC541-7B7A-43D3-8B79-37D633B846F1}">
-                <asvg:svgBlip xmlns:asvg="http://schemas.microsoft.com/office/drawing/2016/SVG/main" r:embed="rId8"/>
-              </a:ext>
-            </a:extLst>
-          </a:blip>
-          <a:stretch>
-            <a:fillRect/>
-          </a:stretch>
-        </p:blipFill>
-        <p:spPr>
-          <a:xfrm>
-            <a:off x="633412" y="5357811"/>
-            <a:ext cx="5610225" cy="1038225"/>
+            <a:off x="496653" y="5252937"/>
+            <a:ext cx="5389295" cy="1143100"/>
           </a:xfrm>
           <a:prstGeom prst="rect">
             <a:avLst/>
@@ -4600,6 +4562,42 @@
           </a:p>
         </p:txBody>
       </p:sp>
+      <p:pic>
+        <p:nvPicPr>
+          <p:cNvPr id="8" name="Рисунок 7">
+            <a:extLst>
+              <a:ext uri="{FF2B5EF4-FFF2-40B4-BE49-F238E27FC236}">
+                <a16:creationId xmlns:a16="http://schemas.microsoft.com/office/drawing/2014/main" id="{74797DC9-BCCB-80EA-8C25-A80658181FE9}"/>
+              </a:ext>
+            </a:extLst>
+          </p:cNvPr>
+          <p:cNvPicPr>
+            <a:picLocks noChangeAspect="1"/>
+          </p:cNvPicPr>
+          <p:nvPr/>
+        </p:nvPicPr>
+        <p:blipFill>
+          <a:blip r:embed="rId6">
+            <a:extLst>
+              <a:ext uri="{96DAC541-7B7A-43D3-8B79-37D633B846F1}">
+                <asvg:svgBlip xmlns:asvg="http://schemas.microsoft.com/office/drawing/2016/SVG/main" r:embed="rId7"/>
+              </a:ext>
+            </a:extLst>
+          </a:blip>
+          <a:stretch>
+            <a:fillRect/>
+          </a:stretch>
+        </p:blipFill>
+        <p:spPr>
+          <a:xfrm>
+            <a:off x="7893586" y="458742"/>
+            <a:ext cx="1576387" cy="686192"/>
+          </a:xfrm>
+          <a:prstGeom prst="rect">
+            <a:avLst/>
+          </a:prstGeom>
+        </p:spPr>
+      </p:pic>
     </p:spTree>
     <p:extLst>
       <p:ext uri="{BB962C8B-B14F-4D97-AF65-F5344CB8AC3E}">
@@ -4709,12 +4707,158 @@
           </a:prstGeom>
         </p:spPr>
       </p:pic>
+      <p:sp>
+        <p:nvSpPr>
+          <p:cNvPr id="13" name="TextBox 12">
+            <a:extLst>
+              <a:ext uri="{FF2B5EF4-FFF2-40B4-BE49-F238E27FC236}">
+                <a16:creationId xmlns:a16="http://schemas.microsoft.com/office/drawing/2014/main" id="{A23DD19E-8AB0-1C65-F02F-819F530224CD}"/>
+              </a:ext>
+            </a:extLst>
+          </p:cNvPr>
+          <p:cNvSpPr txBox="1"/>
+          <p:nvPr/>
+        </p:nvSpPr>
+        <p:spPr>
+          <a:xfrm>
+            <a:off x="633412" y="2782669"/>
+            <a:ext cx="7177088" cy="646331"/>
+          </a:xfrm>
+          <a:prstGeom prst="rect">
+            <a:avLst/>
+          </a:prstGeom>
+          <a:noFill/>
+        </p:spPr>
+        <p:txBody>
+          <a:bodyPr wrap="square" rtlCol="0">
+            <a:spAutoFit/>
+          </a:bodyPr>
+          <a:lstStyle/>
+          <a:p>
+            <a:r>
+              <a:rPr lang="en-US" sz="3600" dirty="0">
+                <a:solidFill>
+                  <a:srgbClr val="2E2C7E"/>
+                </a:solidFill>
+                <a:latin typeface="+mj-lt"/>
+              </a:rPr>
+              <a:t>TITLE</a:t>
+            </a:r>
+            <a:endParaRPr lang="ru-RU" sz="3600" dirty="0">
+              <a:solidFill>
+                <a:srgbClr val="2E2C7E"/>
+              </a:solidFill>
+              <a:latin typeface="+mj-lt"/>
+            </a:endParaRPr>
+          </a:p>
+        </p:txBody>
+      </p:sp>
+      <p:sp>
+        <p:nvSpPr>
+          <p:cNvPr id="15" name="TextBox 14">
+            <a:extLst>
+              <a:ext uri="{FF2B5EF4-FFF2-40B4-BE49-F238E27FC236}">
+                <a16:creationId xmlns:a16="http://schemas.microsoft.com/office/drawing/2014/main" id="{C6FF5138-E289-47EE-915E-0624147CF013}"/>
+              </a:ext>
+            </a:extLst>
+          </p:cNvPr>
+          <p:cNvSpPr txBox="1"/>
+          <p:nvPr/>
+        </p:nvSpPr>
+        <p:spPr>
+          <a:xfrm>
+            <a:off x="633412" y="3331427"/>
+            <a:ext cx="7177088" cy="369332"/>
+          </a:xfrm>
+          <a:prstGeom prst="rect">
+            <a:avLst/>
+          </a:prstGeom>
+          <a:noFill/>
+        </p:spPr>
+        <p:txBody>
+          <a:bodyPr wrap="square" rtlCol="0">
+            <a:spAutoFit/>
+          </a:bodyPr>
+          <a:lstStyle/>
+          <a:p>
+            <a:r>
+              <a:rPr lang="en-US" dirty="0">
+                <a:solidFill>
+                  <a:srgbClr val="2E2C7E"/>
+                </a:solidFill>
+              </a:rPr>
+              <a:t>Subtitle</a:t>
+            </a:r>
+            <a:endParaRPr lang="ru-RU" dirty="0">
+              <a:solidFill>
+                <a:srgbClr val="2E2C7E"/>
+              </a:solidFill>
+            </a:endParaRPr>
+          </a:p>
+        </p:txBody>
+      </p:sp>
+      <p:sp>
+        <p:nvSpPr>
+          <p:cNvPr id="16" name="TextBox 15">
+            <a:extLst>
+              <a:ext uri="{FF2B5EF4-FFF2-40B4-BE49-F238E27FC236}">
+                <a16:creationId xmlns:a16="http://schemas.microsoft.com/office/drawing/2014/main" id="{28A7D5A0-6756-D657-9E05-7028AFEB173A}"/>
+              </a:ext>
+            </a:extLst>
+          </p:cNvPr>
+          <p:cNvSpPr txBox="1"/>
+          <p:nvPr/>
+        </p:nvSpPr>
+        <p:spPr>
+          <a:xfrm>
+            <a:off x="633412" y="5398828"/>
+            <a:ext cx="3662363" cy="923330"/>
+          </a:xfrm>
+          <a:prstGeom prst="rect">
+            <a:avLst/>
+          </a:prstGeom>
+          <a:noFill/>
+        </p:spPr>
+        <p:txBody>
+          <a:bodyPr wrap="square" rtlCol="0">
+            <a:spAutoFit/>
+          </a:bodyPr>
+          <a:lstStyle/>
+          <a:p>
+            <a:r>
+              <a:rPr lang="en-US" dirty="0">
+                <a:solidFill>
+                  <a:srgbClr val="2E2C7E"/>
+                </a:solidFill>
+              </a:rPr>
+              <a:t>Speaker</a:t>
+            </a:r>
+          </a:p>
+          <a:p>
+            <a:r>
+              <a:rPr lang="en-US" dirty="0">
+                <a:solidFill>
+                  <a:srgbClr val="2E2C7E"/>
+                </a:solidFill>
+              </a:rPr>
+              <a:t>Name</a:t>
+            </a:r>
+          </a:p>
+          <a:p>
+            <a:endParaRPr lang="ru-RU" dirty="0">
+              <a:solidFill>
+                <a:srgbClr val="2E2C7E"/>
+              </a:solidFill>
+            </a:endParaRPr>
+          </a:p>
+        </p:txBody>
+      </p:sp>
       <p:pic>
         <p:nvPicPr>
-          <p:cNvPr id="12" name="Рисунок 11">
-            <a:extLst>
-              <a:ext uri="{FF2B5EF4-FFF2-40B4-BE49-F238E27FC236}">
-                <a16:creationId xmlns:a16="http://schemas.microsoft.com/office/drawing/2014/main" id="{FAF1A9C5-B80C-8041-DF8B-194A077B4D50}"/>
+          <p:cNvPr id="18" name="Рисунок 17">
+            <a:extLst>
+              <a:ext uri="{FF2B5EF4-FFF2-40B4-BE49-F238E27FC236}">
+                <a16:creationId xmlns:a16="http://schemas.microsoft.com/office/drawing/2014/main" id="{9A940AFB-076F-0CCC-9145-C19B347465E1}"/>
               </a:ext>
             </a:extLst>
           </p:cNvPr>
@@ -4737,166 +4881,20 @@
         </p:blipFill>
         <p:spPr>
           <a:xfrm>
-            <a:off x="6996112" y="452437"/>
-            <a:ext cx="4638675" cy="1076325"/>
+            <a:off x="2774261" y="412727"/>
+            <a:ext cx="1479251" cy="713521"/>
           </a:xfrm>
           <a:prstGeom prst="rect">
             <a:avLst/>
           </a:prstGeom>
         </p:spPr>
       </p:pic>
-      <p:sp>
-        <p:nvSpPr>
-          <p:cNvPr id="13" name="TextBox 12">
-            <a:extLst>
-              <a:ext uri="{FF2B5EF4-FFF2-40B4-BE49-F238E27FC236}">
-                <a16:creationId xmlns:a16="http://schemas.microsoft.com/office/drawing/2014/main" id="{A23DD19E-8AB0-1C65-F02F-819F530224CD}"/>
-              </a:ext>
-            </a:extLst>
-          </p:cNvPr>
-          <p:cNvSpPr txBox="1"/>
-          <p:nvPr/>
-        </p:nvSpPr>
-        <p:spPr>
-          <a:xfrm>
-            <a:off x="633412" y="2782669"/>
-            <a:ext cx="7177088" cy="646331"/>
-          </a:xfrm>
-          <a:prstGeom prst="rect">
-            <a:avLst/>
-          </a:prstGeom>
-          <a:noFill/>
-        </p:spPr>
-        <p:txBody>
-          <a:bodyPr wrap="square" rtlCol="0">
-            <a:spAutoFit/>
-          </a:bodyPr>
-          <a:lstStyle/>
-          <a:p>
-            <a:r>
-              <a:rPr lang="en-US" sz="3600" dirty="0">
-                <a:solidFill>
-                  <a:srgbClr val="2E2C7E"/>
-                </a:solidFill>
-                <a:latin typeface="+mj-lt"/>
-              </a:rPr>
-              <a:t>TITLE</a:t>
-            </a:r>
-            <a:endParaRPr lang="ru-RU" sz="3600" dirty="0">
-              <a:solidFill>
-                <a:srgbClr val="2E2C7E"/>
-              </a:solidFill>
-              <a:latin typeface="+mj-lt"/>
-            </a:endParaRPr>
-          </a:p>
-        </p:txBody>
-      </p:sp>
-      <p:sp>
-        <p:nvSpPr>
-          <p:cNvPr id="15" name="TextBox 14">
-            <a:extLst>
-              <a:ext uri="{FF2B5EF4-FFF2-40B4-BE49-F238E27FC236}">
-                <a16:creationId xmlns:a16="http://schemas.microsoft.com/office/drawing/2014/main" id="{C6FF5138-E289-47EE-915E-0624147CF013}"/>
-              </a:ext>
-            </a:extLst>
-          </p:cNvPr>
-          <p:cNvSpPr txBox="1"/>
-          <p:nvPr/>
-        </p:nvSpPr>
-        <p:spPr>
-          <a:xfrm>
-            <a:off x="633412" y="3331427"/>
-            <a:ext cx="7177088" cy="369332"/>
-          </a:xfrm>
-          <a:prstGeom prst="rect">
-            <a:avLst/>
-          </a:prstGeom>
-          <a:noFill/>
-        </p:spPr>
-        <p:txBody>
-          <a:bodyPr wrap="square" rtlCol="0">
-            <a:spAutoFit/>
-          </a:bodyPr>
-          <a:lstStyle/>
-          <a:p>
-            <a:r>
-              <a:rPr lang="en-US" dirty="0">
-                <a:solidFill>
-                  <a:srgbClr val="2E2C7E"/>
-                </a:solidFill>
-              </a:rPr>
-              <a:t>Subtitle</a:t>
-            </a:r>
-            <a:endParaRPr lang="ru-RU" dirty="0">
-              <a:solidFill>
-                <a:srgbClr val="2E2C7E"/>
-              </a:solidFill>
-            </a:endParaRPr>
-          </a:p>
-        </p:txBody>
-      </p:sp>
-      <p:sp>
-        <p:nvSpPr>
-          <p:cNvPr id="16" name="TextBox 15">
-            <a:extLst>
-              <a:ext uri="{FF2B5EF4-FFF2-40B4-BE49-F238E27FC236}">
-                <a16:creationId xmlns:a16="http://schemas.microsoft.com/office/drawing/2014/main" id="{28A7D5A0-6756-D657-9E05-7028AFEB173A}"/>
-              </a:ext>
-            </a:extLst>
-          </p:cNvPr>
-          <p:cNvSpPr txBox="1"/>
-          <p:nvPr/>
-        </p:nvSpPr>
-        <p:spPr>
-          <a:xfrm>
-            <a:off x="633412" y="5398828"/>
-            <a:ext cx="3662363" cy="923330"/>
-          </a:xfrm>
-          <a:prstGeom prst="rect">
-            <a:avLst/>
-          </a:prstGeom>
-          <a:noFill/>
-        </p:spPr>
-        <p:txBody>
-          <a:bodyPr wrap="square" rtlCol="0">
-            <a:spAutoFit/>
-          </a:bodyPr>
-          <a:lstStyle/>
-          <a:p>
-            <a:r>
-              <a:rPr lang="en-US" dirty="0">
-                <a:solidFill>
-                  <a:srgbClr val="2E2C7E"/>
-                </a:solidFill>
-              </a:rPr>
-              <a:t>Speaker</a:t>
-            </a:r>
-          </a:p>
-          <a:p>
-            <a:r>
-              <a:rPr lang="en-US" dirty="0">
-                <a:solidFill>
-                  <a:srgbClr val="2E2C7E"/>
-                </a:solidFill>
-              </a:rPr>
-              <a:t>Name</a:t>
-            </a:r>
-          </a:p>
-          <a:p>
-            <a:endParaRPr lang="ru-RU" dirty="0">
-              <a:solidFill>
-                <a:srgbClr val="2E2C7E"/>
-              </a:solidFill>
-            </a:endParaRPr>
-          </a:p>
-        </p:txBody>
-      </p:sp>
       <p:pic>
         <p:nvPicPr>
-          <p:cNvPr id="18" name="Рисунок 17">
-            <a:extLst>
-              <a:ext uri="{FF2B5EF4-FFF2-40B4-BE49-F238E27FC236}">
-                <a16:creationId xmlns:a16="http://schemas.microsoft.com/office/drawing/2014/main" id="{9A940AFB-076F-0CCC-9145-C19B347465E1}"/>
+          <p:cNvPr id="8" name="Рисунок 7">
+            <a:extLst>
+              <a:ext uri="{FF2B5EF4-FFF2-40B4-BE49-F238E27FC236}">
+                <a16:creationId xmlns:a16="http://schemas.microsoft.com/office/drawing/2014/main" id="{043B0456-D1D3-6E20-1763-033E80657344}"/>
               </a:ext>
             </a:extLst>
           </p:cNvPr>
@@ -4919,8 +4917,8 @@
         </p:blipFill>
         <p:spPr>
           <a:xfrm>
-            <a:off x="2774261" y="412727"/>
-            <a:ext cx="1479251" cy="713521"/>
+            <a:off x="6996112" y="465933"/>
+            <a:ext cx="4638675" cy="1076325"/>
           </a:xfrm>
           <a:prstGeom prst="rect">
             <a:avLst/>
@@ -4965,10 +4963,10 @@
       </p:grpSpPr>
       <p:pic>
         <p:nvPicPr>
-          <p:cNvPr id="3" name="Рисунок 2">
-            <a:extLst>
-              <a:ext uri="{FF2B5EF4-FFF2-40B4-BE49-F238E27FC236}">
-                <a16:creationId xmlns:a16="http://schemas.microsoft.com/office/drawing/2014/main" id="{61F87BBC-961D-D423-B754-5BBF685F8D11}"/>
+          <p:cNvPr id="7" name="Рисунок 6" descr="Изображение выглядит как искусство, линия, зарисовка, дизайн&#10;&#10;Содержимое, созданное искусственным интеллектом, может быть неверным.">
+            <a:extLst>
+              <a:ext uri="{FF2B5EF4-FFF2-40B4-BE49-F238E27FC236}">
+                <a16:creationId xmlns:a16="http://schemas.microsoft.com/office/drawing/2014/main" id="{92938ECE-8F62-0F70-DFB3-A0E173121F70}"/>
               </a:ext>
             </a:extLst>
           </p:cNvPr>
@@ -4980,42 +4978,6 @@
         <p:blipFill>
           <a:blip r:embed="rId2">
             <a:extLst>
-              <a:ext uri="{96DAC541-7B7A-43D3-8B79-37D633B846F1}">
-                <asvg:svgBlip xmlns:asvg="http://schemas.microsoft.com/office/drawing/2016/SVG/main" r:embed="rId3"/>
-              </a:ext>
-            </a:extLst>
-          </a:blip>
-          <a:stretch>
-            <a:fillRect/>
-          </a:stretch>
-        </p:blipFill>
-        <p:spPr>
-          <a:xfrm>
-            <a:off x="6596062" y="452437"/>
-            <a:ext cx="5038725" cy="1095375"/>
-          </a:xfrm>
-          <a:prstGeom prst="rect">
-            <a:avLst/>
-          </a:prstGeom>
-        </p:spPr>
-      </p:pic>
-      <p:pic>
-        <p:nvPicPr>
-          <p:cNvPr id="7" name="Рисунок 6" descr="Изображение выглядит как искусство, линия, зарисовка, дизайн&#10;&#10;Содержимое, созданное искусственным интеллектом, может быть неверным.">
-            <a:extLst>
-              <a:ext uri="{FF2B5EF4-FFF2-40B4-BE49-F238E27FC236}">
-                <a16:creationId xmlns:a16="http://schemas.microsoft.com/office/drawing/2014/main" id="{92938ECE-8F62-0F70-DFB3-A0E173121F70}"/>
-              </a:ext>
-            </a:extLst>
-          </p:cNvPr>
-          <p:cNvPicPr>
-            <a:picLocks noChangeAspect="1"/>
-          </p:cNvPicPr>
-          <p:nvPr/>
-        </p:nvPicPr>
-        <p:blipFill>
-          <a:blip r:embed="rId4">
-            <a:extLst>
               <a:ext uri="{28A0092B-C50C-407E-A947-70E740481C1C}">
                 <a14:useLocalDpi xmlns:a14="http://schemas.microsoft.com/office/drawing/2010/main" val="0"/>
               </a:ext>
@@ -5176,10 +5138,46 @@
       </p:sp>
       <p:pic>
         <p:nvPicPr>
-          <p:cNvPr id="9" name="Рисунок 8">
-            <a:extLst>
-              <a:ext uri="{FF2B5EF4-FFF2-40B4-BE49-F238E27FC236}">
-                <a16:creationId xmlns:a16="http://schemas.microsoft.com/office/drawing/2014/main" id="{420B2640-4814-8CB0-E2AC-2D905818ACE0}"/>
+          <p:cNvPr id="10" name="Рисунок 9">
+            <a:extLst>
+              <a:ext uri="{FF2B5EF4-FFF2-40B4-BE49-F238E27FC236}">
+                <a16:creationId xmlns:a16="http://schemas.microsoft.com/office/drawing/2014/main" id="{19E2CAED-F3A6-8765-1A41-92AC0A33CB43}"/>
+              </a:ext>
+            </a:extLst>
+          </p:cNvPr>
+          <p:cNvPicPr>
+            <a:picLocks noChangeAspect="1"/>
+          </p:cNvPicPr>
+          <p:nvPr/>
+        </p:nvPicPr>
+        <p:blipFill>
+          <a:blip r:embed="rId3">
+            <a:extLst>
+              <a:ext uri="{96DAC541-7B7A-43D3-8B79-37D633B846F1}">
+                <asvg:svgBlip xmlns:asvg="http://schemas.microsoft.com/office/drawing/2016/SVG/main" r:embed="rId4"/>
+              </a:ext>
+            </a:extLst>
+          </a:blip>
+          <a:stretch>
+            <a:fillRect/>
+          </a:stretch>
+        </p:blipFill>
+        <p:spPr>
+          <a:xfrm>
+            <a:off x="2774261" y="412727"/>
+            <a:ext cx="1479251" cy="713521"/>
+          </a:xfrm>
+          <a:prstGeom prst="rect">
+            <a:avLst/>
+          </a:prstGeom>
+        </p:spPr>
+      </p:pic>
+      <p:pic>
+        <p:nvPicPr>
+          <p:cNvPr id="11" name="Рисунок 10">
+            <a:extLst>
+              <a:ext uri="{FF2B5EF4-FFF2-40B4-BE49-F238E27FC236}">
+                <a16:creationId xmlns:a16="http://schemas.microsoft.com/office/drawing/2014/main" id="{EC668A36-BF3A-620D-C047-D7B3452F782D}"/>
               </a:ext>
             </a:extLst>
           </p:cNvPr>
@@ -5202,8 +5200,8 @@
         </p:blipFill>
         <p:spPr>
           <a:xfrm>
-            <a:off x="633412" y="458742"/>
-            <a:ext cx="1462536" cy="636633"/>
+            <a:off x="6596061" y="465162"/>
+            <a:ext cx="5038725" cy="1095375"/>
           </a:xfrm>
           <a:prstGeom prst="rect">
             <a:avLst/>
@@ -5212,10 +5210,10 @@
       </p:pic>
       <p:pic>
         <p:nvPicPr>
-          <p:cNvPr id="10" name="Рисунок 9">
-            <a:extLst>
-              <a:ext uri="{FF2B5EF4-FFF2-40B4-BE49-F238E27FC236}">
-                <a16:creationId xmlns:a16="http://schemas.microsoft.com/office/drawing/2014/main" id="{19E2CAED-F3A6-8765-1A41-92AC0A33CB43}"/>
+          <p:cNvPr id="4" name="Рисунок 3">
+            <a:extLst>
+              <a:ext uri="{FF2B5EF4-FFF2-40B4-BE49-F238E27FC236}">
+                <a16:creationId xmlns:a16="http://schemas.microsoft.com/office/drawing/2014/main" id="{A1FF19E0-EC14-11E2-34E1-AC8B154E2FA8}"/>
               </a:ext>
             </a:extLst>
           </p:cNvPr>
@@ -5238,8 +5236,8 @@
         </p:blipFill>
         <p:spPr>
           <a:xfrm>
-            <a:off x="2774261" y="412727"/>
-            <a:ext cx="1479251" cy="713521"/>
+            <a:off x="633412" y="458742"/>
+            <a:ext cx="1462536" cy="636633"/>
           </a:xfrm>
           <a:prstGeom prst="rect">
             <a:avLst/>
@@ -5284,7 +5282,7 @@
       </p:grpSpPr>
       <p:pic>
         <p:nvPicPr>
-          <p:cNvPr id="10" name="Рисунок 9" descr="Изображение выглядит как текст, Шрифт, снимок экрана, Графика&#10;&#10;Содержимое, созданное искусственным интеллектом, может быть неверным.">
+          <p:cNvPr id="10" name="Рисунок 9">
             <a:extLst>
               <a:ext uri="{FF2B5EF4-FFF2-40B4-BE49-F238E27FC236}">
                 <a16:creationId xmlns:a16="http://schemas.microsoft.com/office/drawing/2014/main" id="{52D68267-1208-0B8C-F82D-5C823D35FA88}"/>
@@ -5304,14 +5302,13 @@
               </a:ext>
             </a:extLst>
           </a:blip>
-          <a:stretch>
-            <a:fillRect/>
-          </a:stretch>
+          <a:srcRect/>
+          <a:stretch/>
         </p:blipFill>
         <p:spPr>
           <a:xfrm>
-            <a:off x="107004" y="107004"/>
-            <a:ext cx="3922627" cy="924747"/>
+            <a:off x="107006" y="107004"/>
+            <a:ext cx="3922622" cy="924746"/>
           </a:xfrm>
           <a:prstGeom prst="rect">
             <a:avLst/>
@@ -5356,7 +5353,7 @@
       </p:grpSpPr>
       <p:pic>
         <p:nvPicPr>
-          <p:cNvPr id="3" name="Рисунок 2" descr="Изображение выглядит как Графика, снимок экрана, Шрифт, текст&#10;&#10;Содержимое, созданное искусственным интеллектом, может быть неверным.">
+          <p:cNvPr id="3" name="Рисунок 2">
             <a:extLst>
               <a:ext uri="{FF2B5EF4-FFF2-40B4-BE49-F238E27FC236}">
                 <a16:creationId xmlns:a16="http://schemas.microsoft.com/office/drawing/2014/main" id="{2EC895B1-1BBE-0C6E-60A3-0E721452721A}"/>
@@ -5376,14 +5373,13 @@
               </a:ext>
             </a:extLst>
           </a:blip>
-          <a:stretch>
-            <a:fillRect/>
-          </a:stretch>
+          <a:srcRect/>
+          <a:stretch/>
         </p:blipFill>
         <p:spPr>
           <a:xfrm>
-            <a:off x="97479" y="107004"/>
-            <a:ext cx="4332023" cy="919295"/>
+            <a:off x="97479" y="107228"/>
+            <a:ext cx="4332023" cy="918846"/>
           </a:xfrm>
           <a:prstGeom prst="rect">
             <a:avLst/>
@@ -5428,10 +5424,10 @@
       </p:grpSpPr>
       <p:pic>
         <p:nvPicPr>
-          <p:cNvPr id="6" name="Рисунок 5" descr="Изображение выглядит как Красочность, паутина, небо&#10;&#10;Содержимое, созданное искусственным интеллектом, может быть неверным.">
-            <a:extLst>
-              <a:ext uri="{FF2B5EF4-FFF2-40B4-BE49-F238E27FC236}">
-                <a16:creationId xmlns:a16="http://schemas.microsoft.com/office/drawing/2014/main" id="{9E831972-7185-4365-B28B-B9CFAD6AD47B}"/>
+          <p:cNvPr id="5" name="Рисунок 4">
+            <a:extLst>
+              <a:ext uri="{FF2B5EF4-FFF2-40B4-BE49-F238E27FC236}">
+                <a16:creationId xmlns:a16="http://schemas.microsoft.com/office/drawing/2014/main" id="{7465D744-93CC-65FF-2592-F4C8B5D73CAC}"/>
               </a:ext>
             </a:extLst>
           </p:cNvPr>
@@ -5448,15 +5444,14 @@
               </a:ext>
             </a:extLst>
           </a:blip>
-          <a:srcRect t="85278"/>
           <a:stretch>
             <a:fillRect/>
           </a:stretch>
         </p:blipFill>
         <p:spPr>
           <a:xfrm>
-            <a:off x="0" y="8323"/>
-            <a:ext cx="12192000" cy="1229927"/>
+            <a:off x="0" y="-1"/>
+            <a:ext cx="12192000" cy="1157287"/>
           </a:xfrm>
           <a:prstGeom prst="rect">
             <a:avLst/>
@@ -5480,19 +5475,18 @@
         <p:blipFill>
           <a:blip r:embed="rId3">
             <a:extLst>
-              <a:ext uri="{96DAC541-7B7A-43D3-8B79-37D633B846F1}">
-                <asvg:svgBlip xmlns:asvg="http://schemas.microsoft.com/office/drawing/2016/SVG/main" r:embed="rId4"/>
+              <a:ext uri="{28A0092B-C50C-407E-A947-70E740481C1C}">
+                <a14:useLocalDpi xmlns:a14="http://schemas.microsoft.com/office/drawing/2010/main" val="0"/>
               </a:ext>
             </a:extLst>
           </a:blip>
-          <a:stretch>
-            <a:fillRect/>
-          </a:stretch>
+          <a:srcRect/>
+          <a:stretch/>
         </p:blipFill>
         <p:spPr>
           <a:xfrm>
-            <a:off x="195262" y="119061"/>
-            <a:ext cx="5610225" cy="1038225"/>
+            <a:off x="95750" y="80149"/>
+            <a:ext cx="4894848" cy="1038225"/>
           </a:xfrm>
           <a:prstGeom prst="rect">
             <a:avLst/>
@@ -5537,10 +5531,10 @@
       </p:grpSpPr>
       <p:pic>
         <p:nvPicPr>
-          <p:cNvPr id="3" name="Рисунок 2" descr="Изображение выглядит как Красочность, паутина, небо&#10;&#10;Содержимое, созданное искусственным интеллектом, может быть неверным.">
-            <a:extLst>
-              <a:ext uri="{FF2B5EF4-FFF2-40B4-BE49-F238E27FC236}">
-                <a16:creationId xmlns:a16="http://schemas.microsoft.com/office/drawing/2014/main" id="{025F6838-3B80-827E-81AC-7D2C7016E6E7}"/>
+          <p:cNvPr id="4" name="Рисунок 3">
+            <a:extLst>
+              <a:ext uri="{FF2B5EF4-FFF2-40B4-BE49-F238E27FC236}">
+                <a16:creationId xmlns:a16="http://schemas.microsoft.com/office/drawing/2014/main" id="{9B94D54B-BDC4-5084-4BAD-916C0358A63F}"/>
               </a:ext>
             </a:extLst>
           </p:cNvPr>
@@ -5557,15 +5551,14 @@
               </a:ext>
             </a:extLst>
           </a:blip>
-          <a:srcRect t="85278"/>
           <a:stretch>
             <a:fillRect/>
           </a:stretch>
         </p:blipFill>
         <p:spPr>
           <a:xfrm>
-            <a:off x="0" y="8323"/>
-            <a:ext cx="12192000" cy="1229927"/>
+            <a:off x="0" y="-1"/>
+            <a:ext cx="12192000" cy="1157287"/>
           </a:xfrm>
           <a:prstGeom prst="rect">
             <a:avLst/>
@@ -5589,19 +5582,18 @@
         <p:blipFill>
           <a:blip r:embed="rId3">
             <a:extLst>
-              <a:ext uri="{96DAC541-7B7A-43D3-8B79-37D633B846F1}">
-                <asvg:svgBlip xmlns:asvg="http://schemas.microsoft.com/office/drawing/2016/SVG/main" r:embed="rId4"/>
+              <a:ext uri="{28A0092B-C50C-407E-A947-70E740481C1C}">
+                <a14:useLocalDpi xmlns:a14="http://schemas.microsoft.com/office/drawing/2010/main" val="0"/>
               </a:ext>
             </a:extLst>
           </a:blip>
-          <a:stretch>
-            <a:fillRect/>
-          </a:stretch>
+          <a:srcRect/>
+          <a:stretch/>
         </p:blipFill>
         <p:spPr>
           <a:xfrm>
-            <a:off x="195262" y="119061"/>
-            <a:ext cx="5248275" cy="1038225"/>
+            <a:off x="111570" y="68693"/>
+            <a:ext cx="4403982" cy="1038224"/>
           </a:xfrm>
           <a:prstGeom prst="rect">
             <a:avLst/>
